--- a/Docs/business/Circuvent-Investor-Deck.pptx
+++ b/Docs/business/Circuvent-Investor-Deck.pptx
@@ -3303,7 +3303,7 @@
                 </a:solidFill>
                 <a:latin typeface="Calibri"/>
               </a:rPr>
-              <a:t>21 shipping products across 4 categories — designed, manufactured, and run on our own platform.</a:t>
+              <a:t>21 products on sale across 4 categories — designed, manufactured, and run on our own platform.</a:t>
             </a:r>
           </a:p>
         </p:txBody>
@@ -6594,7 +6594,7 @@
                 </a:solidFill>
                 <a:latin typeface="Calibri"/>
               </a:rPr>
-              <a:t>Every figure on this slide is counted from the source repository at generation time, not maintained by hand. The catalogue spans ₹799 to ₹24,999 across Energy, Home Automation, Safety, Water Management.</a:t>
+              <a:t>Every figure on this slide is counted from the source repository at generation time, not maintained by hand. The catalogue spans ₹799 to ₹24,999 across Safety, Home Automation, Water Management, Energy.</a:t>
             </a:r>
           </a:p>
         </p:txBody>

--- a/Docs/business/Circuvent-Investor-Deck.pptx
+++ b/Docs/business/Circuvent-Investor-Deck.pptx
@@ -5183,7 +5183,7 @@
                 </a:solidFill>
                 <a:latin typeface="Calibri"/>
               </a:rPr>
-              <a:t>22 device types on a single shared ESP32 library, so provisioning, connectivity and over-the-air update behave identically across the fleet.</a:t>
+              <a:t>23 device types on a single shared ESP32 library, so provisioning, connectivity and over-the-air update behave identically across the fleet.</a:t>
             </a:r>
           </a:p>
           <a:p>
@@ -6276,7 +6276,7 @@
                 </a:solidFill>
                 <a:latin typeface="Calibri"/>
               </a:rPr>
-              <a:t>22</a:t>
+              <a:t>23</a:t>
             </a:r>
           </a:p>
         </p:txBody>

--- a/Docs/business/Circuvent-Investor-Deck.pptx
+++ b/Docs/business/Circuvent-Investor-Deck.pptx
@@ -3303,7 +3303,7 @@
                 </a:solidFill>
                 <a:latin typeface="Calibri"/>
               </a:rPr>
-              <a:t>21 products on sale across 4 categories — designed, manufactured, and run on our own platform.</a:t>
+              <a:t>22 products on sale across 4 categories — designed, manufactured, and run on our own platform.</a:t>
             </a:r>
           </a:p>
         </p:txBody>
@@ -3423,7 +3423,7 @@
                 </a:solidFill>
                 <a:latin typeface="Calibri"/>
               </a:rPr>
-              <a:t>Generated 2026-08-13 from the live product catalogue</a:t>
+              <a:t>Generated 2026-08-15 from the live product catalogue</a:t>
             </a:r>
           </a:p>
         </p:txBody>
@@ -3787,7 +3787,7 @@
                 </a:solidFill>
                 <a:latin typeface="Calibri"/>
               </a:rPr>
-              <a:t>21 products on sale</a:t>
+              <a:t>22 products on sale</a:t>
             </a:r>
           </a:p>
           <a:p>
@@ -4898,7 +4898,7 @@
                 </a:solidFill>
                 <a:latin typeface="Calibri"/>
               </a:rPr>
-              <a:t>Generated 2026-08-13 from the live product catalogue</a:t>
+              <a:t>Generated 2026-08-15 from the live product catalogue</a:t>
             </a:r>
           </a:p>
         </p:txBody>
@@ -5183,7 +5183,7 @@
                 </a:solidFill>
                 <a:latin typeface="Calibri"/>
               </a:rPr>
-              <a:t>23 device types on a single shared ESP32 library, so provisioning, connectivity and over-the-air update behave identically across the fleet.</a:t>
+              <a:t>24 device types on a single shared ESP32 library, so provisioning, connectivity and over-the-air update behave identically across the fleet.</a:t>
             </a:r>
           </a:p>
           <a:p>
@@ -6156,7 +6156,7 @@
                 </a:solidFill>
                 <a:latin typeface="Calibri"/>
               </a:rPr>
-              <a:t>21</a:t>
+              <a:t>22</a:t>
             </a:r>
           </a:p>
         </p:txBody>
@@ -6276,7 +6276,7 @@
                 </a:solidFill>
                 <a:latin typeface="Calibri"/>
               </a:rPr>
-              <a:t>23</a:t>
+              <a:t>24</a:t>
             </a:r>
           </a:p>
         </p:txBody>
@@ -7106,7 +7106,7 @@
                           </a:solidFill>
                           <a:latin typeface="Calibri"/>
                         </a:rPr>
-                        <a:t>7</a:t>
+                        <a:t>8</a:t>
                       </a:r>
                     </a:p>
                   </a:txBody>
@@ -7152,7 +7152,7 @@
                           </a:solidFill>
                           <a:latin typeface="Calibri"/>
                         </a:rPr>
-                        <a:t>₹3,499</a:t>
+                        <a:t>₹5,499</a:t>
                       </a:r>
                     </a:p>
                   </a:txBody>
